--- a/decks/maths-speed/maths-speed_ch4_distance-time.pptx
+++ b/decks/maths-speed/maths-speed_ch4_distance-time.pptx
@@ -122,29 +122,29 @@
   <p:extLst>
     <p:ext uri="{521415D9-36F7-43E2-AB2F-B90AF26B5E84}">
       <p14:sectionLst xmlns:p14="http://schemas.microsoft.com/office/powerpoint/2010/main">
-        <p14:section name="Opening" id="{7c49c227-62e1-db4d-ecf2-805c9bb20fd4}">
+        <p14:section name="Opening" id="{8dadfd3a-7975-2734-d273-ea53df8610b9}">
           <p14:sldIdLst>
             <p14:sldId id="256"/>
           </p14:sldIdLst>
         </p14:section>
-        <p14:section name="Gate" id="{1fb36c4a-5e45-2dc2-6372-79d32b70d42e}">
+        <p14:section name="Gate" id="{92d1e7fb-1aa0-ecc6-fd21-c2914712ed47}">
           <p14:sldIdLst>
             <p14:sldId id="257"/>
             <p14:sldId id="258"/>
           </p14:sldIdLst>
         </p14:section>
-        <p14:section name="Pre-teach" id="{9a6eb9bf-7af7-b028-e40e-a23d0c3d6003}">
+        <p14:section name="Pre-teach" id="{758336a6-13cc-764c-6945-857d4d399e50}">
           <p14:sldIdLst>
             <p14:sldId id="259"/>
           </p14:sldIdLst>
         </p14:section>
-        <p14:section name="Read-along" id="{33b63744-2125-73a8-4a28-4d8fbaaa83e6}">
+        <p14:section name="Read-along" id="{aaacd766-2833-c04f-cbb7-8229f5695129}">
           <p14:sldIdLst>
             <p14:sldId id="260"/>
             <p14:sldId id="261"/>
           </p14:sldIdLst>
         </p14:section>
-        <p14:section name="Teach" id="{68eecad5-56e6-e788-8491-44c72766f5e2}">
+        <p14:section name="Teach" id="{799d9cf0-cfae-f2f1-4ddf-083159235c54}">
           <p14:sldIdLst>
             <p14:sldId id="262"/>
             <p14:sldId id="263"/>
@@ -152,18 +152,18 @@
             <p14:sldId id="265"/>
           </p14:sldIdLst>
         </p14:section>
-        <p14:section name="Routes" id="{38bd8bda-876d-4aaf-3f3b-6318a4e16441}">
+        <p14:section name="Routes" id="{96c0e20d-e616-a69a-9888-6e6c131f3f8e}">
           <p14:sldIdLst>
             <p14:sldId id="266"/>
             <p14:sldId id="267"/>
           </p14:sldIdLst>
         </p14:section>
-        <p14:section name="Close" id="{e62fc8db-4ea0-b097-97f9-1a3b9122c8cc}">
+        <p14:section name="Close" id="{527a5113-aa93-2c13-3cb0-2abeda967440}">
           <p14:sldIdLst>
             <p14:sldId id="268"/>
           </p14:sldIdLst>
         </p14:section>
-        <p14:section name="Answers" id="{bc193b5e-d929-a407-df8a-d5d678775e17}">
+        <p14:section name="Answers" id="{b3e0f62e-91ca-7a02-49ca-480b9e4a635d}">
           <p14:sldIdLst>
             <p14:sldId id="269"/>
             <p14:sldId id="270"/>
@@ -9229,7 +9229,7 @@
                 <a:ea typeface="Calibri" pitchFamily="34" charset="-122"/>
                 <a:cs typeface="Calibri" pitchFamily="34" charset="-120"/>
               </a:rPr>
-              <a:t>time = speed × distance</a:t>
+              <a:t>time = speed ÷ distance</a:t>
             </a:r>
             <a:endParaRPr lang="en-US" sz="2200" dirty="0"/>
           </a:p>
@@ -9303,7 +9303,7 @@
                 <a:ea typeface="Calibri" pitchFamily="34" charset="-122"/>
                 <a:cs typeface="Calibri" pitchFamily="34" charset="-120"/>
               </a:rPr>
-              <a:t>time = speed ÷ distance</a:t>
+              <a:t>time = speed × distance</a:t>
             </a:r>
             <a:endParaRPr lang="en-US" sz="2200" dirty="0"/>
           </a:p>

--- a/decks/maths-speed/maths-speed_ch4_distance-time.pptx
+++ b/decks/maths-speed/maths-speed_ch4_distance-time.pptx
@@ -122,29 +122,29 @@
   <p:extLst>
     <p:ext uri="{521415D9-36F7-43E2-AB2F-B90AF26B5E84}">
       <p14:sectionLst xmlns:p14="http://schemas.microsoft.com/office/powerpoint/2010/main">
-        <p14:section name="Opening" id="{8dadfd3a-7975-2734-d273-ea53df8610b9}">
+        <p14:section name="Opening" id="{48e4be4b-330d-fb45-b7e2-1e467624fbf2}">
           <p14:sldIdLst>
             <p14:sldId id="256"/>
           </p14:sldIdLst>
         </p14:section>
-        <p14:section name="Gate" id="{92d1e7fb-1aa0-ecc6-fd21-c2914712ed47}">
+        <p14:section name="Gate" id="{d47c38df-8b62-66c3-b6ea-970dab68fac8}">
           <p14:sldIdLst>
             <p14:sldId id="257"/>
             <p14:sldId id="258"/>
           </p14:sldIdLst>
         </p14:section>
-        <p14:section name="Pre-teach" id="{758336a6-13cc-764c-6945-857d4d399e50}">
+        <p14:section name="Pre-teach" id="{b56cfdea-6a61-5201-6a14-02239553c1b5}">
           <p14:sldIdLst>
             <p14:sldId id="259"/>
           </p14:sldIdLst>
         </p14:section>
-        <p14:section name="Read-along" id="{aaacd766-2833-c04f-cbb7-8229f5695129}">
+        <p14:section name="Read-along" id="{b1c78c37-f069-bcd6-2032-a91b71b7d4ad}">
           <p14:sldIdLst>
             <p14:sldId id="260"/>
             <p14:sldId id="261"/>
           </p14:sldIdLst>
         </p14:section>
-        <p14:section name="Teach" id="{799d9cf0-cfae-f2f1-4ddf-083159235c54}">
+        <p14:section name="Teach" id="{00cc1b72-ec04-fba6-3f3e-6b050e6a941a}">
           <p14:sldIdLst>
             <p14:sldId id="262"/>
             <p14:sldId id="263"/>
@@ -152,18 +152,18 @@
             <p14:sldId id="265"/>
           </p14:sldIdLst>
         </p14:section>
-        <p14:section name="Routes" id="{96c0e20d-e616-a69a-9888-6e6c131f3f8e}">
+        <p14:section name="Routes" id="{2c971980-cdc2-1f35-2853-3d46189980da}">
           <p14:sldIdLst>
             <p14:sldId id="266"/>
             <p14:sldId id="267"/>
           </p14:sldIdLst>
         </p14:section>
-        <p14:section name="Close" id="{527a5113-aa93-2c13-3cb0-2abeda967440}">
+        <p14:section name="Close" id="{833b2bdc-23a9-df6b-74f4-c69667527996}">
           <p14:sldIdLst>
             <p14:sldId id="268"/>
           </p14:sldIdLst>
         </p14:section>
-        <p14:section name="Answers" id="{b3e0f62e-91ca-7a02-49ca-480b9e4a635d}">
+        <p14:section name="Answers" id="{b49dbf40-cd78-e1fc-508f-c9aca4b8f254}">
           <p14:sldIdLst>
             <p14:sldId id="269"/>
             <p14:sldId id="270"/>
